--- a/PPT-version/Data-Engineering/Data-Engineering-讲义.pptx
+++ b/PPT-version/Data-Engineering/Data-Engineering-讲义.pptx
@@ -3935,7 +3935,7 @@
                 </a:solidFill>
                 <a:latin typeface="Calibri"/>
               </a:rPr>
-              <a:t>用基准口径说话：opendataloader-bench 上 Docling 0.877 / MinerU 0.831，表格与阅读顺序是分水岭</a:t>
+              <a:t>用基准口径说话：OmniDocBench 与 olmOCR-bench 两榜排序不一致，表格与阅读顺序才是分水岭</a:t>
             </a:r>
           </a:p>
         </p:txBody>
@@ -4357,7 +4357,7 @@
                 </a:solidFill>
                 <a:latin typeface="Calibri"/>
               </a:rPr>
-              <a:t>画像（2026-07）</a:t>
+              <a:t>画像（2026-08）</a:t>
             </a:r>
           </a:p>
         </p:txBody>
@@ -4850,7 +4850,7 @@
                 </a:solidFill>
                 <a:latin typeface="Calibri"/>
               </a:rPr>
-              <a:t>OpenDataLab 出品，CJK 复杂版面最强，出 MD+JSON</a:t>
+              <a:t>OpenDataLab 出品，2.5 起转 1.2B VLM，许可弃 AGPL</a:t>
             </a:r>
           </a:p>
         </p:txBody>
@@ -5325,7 +5325,7 @@
                 </a:solidFill>
                 <a:latin typeface="Calibri"/>
               </a:rPr>
-              <a:t>基准口径（opendataloader-bench，200 PDF）：Docling 0.877 &gt; marker 0.861 &gt; MinerU 0.831——但中文场景请自测：CJK 版面是 MinerU 的主场。</a:t>
+              <a:t>OmniDocBench 上 MinerU2.5-Pro 95.75 靠前、Marker 78.44；olmOCR-bench 上 Marker 2 得 76.0、Docling 50.3——两榜排序不一致，请以客户文档自测为准。</a:t>
             </a:r>
           </a:p>
         </p:txBody>
@@ -7689,7 +7689,7 @@
                 </a:solidFill>
                 <a:latin typeface="Calibri"/>
               </a:rPr>
-              <a:t>Docling 0.877 / MinerU 0.831（英文基准）；CJK 场景自测为准。</a:t>
+              <a:t>OmniDocBench 与 olmOCR-bench 两榜排序不一致；一律自测为准。</a:t>
             </a:r>
           </a:p>
         </p:txBody>
